--- a/Bikin-Website/M08-Uji-Coba-Nyata-Terus-Diperbaiki/BW-M08-Uji-Coba-Nyata-Terus-Diperbaiki.pptx
+++ b/Bikin-Website/M08-Uji-Coba-Nyata-Terus-Diperbaiki/BW-M08-Uji-Coba-Nyata-Terus-Diperbaiki.pptx
@@ -4862,18 +4862,121 @@
       </p:sp>
       <p:sp>
         <p:nvSpPr>
-          <p:cNvPr id="7" name="Shape 5"/>
+          <p:cNvPr id="7" name="Text 5"/>
+          <p:cNvSpPr txBox="1"/>
+          <p:nvPr/>
+        </p:nvSpPr>
+        <p:spPr>
+          <a:xfrm>
+            <a:off x="502920" y="1920240"/>
+            <a:ext cx="11183112" cy="274320"/>
+          </a:xfrm>
+          <a:prstGeom prst="rect">
+            <a:avLst/>
+          </a:prstGeom>
+          <a:noFill/>
+          <a:ln/>
+        </p:spPr>
+        <p:txBody>
+          <a:bodyPr wrap="square" lIns="0" tIns="0" rIns="0" bIns="0" rtlCol="0" anchor="ctr"/>
+          <a:lstStyle/>
+          <a:p>
+            <a:pPr indent="0" marL="0">
+              <a:buNone/>
+            </a:pPr>
+            <a:r>
+              <a:rPr lang="en-US" sz="1250" b="1" spc="40" kern="0" dirty="0">
+                <a:solidFill>
+                  <a:srgbClr val="4B36C7"/>
+                </a:solidFill>
+                <a:latin typeface="Helvetica" pitchFamily="34" charset="0"/>
+                <a:ea typeface="Helvetica" pitchFamily="34" charset="-122"/>
+                <a:cs typeface="Helvetica" pitchFamily="34" charset="-120"/>
+              </a:rPr>
+              <a:t>CONTOH PROMPT SUSUN USER TESTING</a:t>
+            </a:r>
+            <a:endParaRPr lang="en-US" sz="1250" dirty="0"/>
+          </a:p>
+        </p:txBody>
+      </p:sp>
+      <p:sp>
+        <p:nvSpPr>
+          <p:cNvPr id="8" name="Shape 6"/>
           <p:cNvSpPr/>
           <p:nvPr/>
         </p:nvSpPr>
         <p:spPr>
           <a:xfrm>
-            <a:off x="502920" y="1920240"/>
-            <a:ext cx="11183112" cy="1183640"/>
+            <a:off x="502920" y="2231136"/>
+            <a:ext cx="11183112" cy="815086"/>
           </a:xfrm>
           <a:prstGeom prst="roundRect">
             <a:avLst>
-              <a:gd name="adj" fmla="val 9270"/>
+              <a:gd name="adj" fmla="val 8975"/>
+            </a:avLst>
+          </a:prstGeom>
+          <a:solidFill>
+            <a:srgbClr val="0D1321"/>
+          </a:solidFill>
+          <a:ln/>
+        </p:spPr>
+      </p:sp>
+      <p:sp>
+        <p:nvSpPr>
+          <p:cNvPr id="9" name="Text 7"/>
+          <p:cNvSpPr txBox="1"/>
+          <p:nvPr/>
+        </p:nvSpPr>
+        <p:spPr>
+          <a:xfrm>
+            <a:off x="731520" y="2432304"/>
+            <a:ext cx="10725912" cy="412750"/>
+          </a:xfrm>
+          <a:prstGeom prst="rect">
+            <a:avLst/>
+          </a:prstGeom>
+          <a:noFill/>
+          <a:ln/>
+        </p:spPr>
+        <p:txBody>
+          <a:bodyPr wrap="square" lIns="0" tIns="0" rIns="0" bIns="0" rtlCol="0" anchor="ctr"/>
+          <a:lstStyle/>
+          <a:p>
+            <a:pPr indent="0" marL="0">
+              <a:lnSpc>
+                <a:spcPct val="130000"/>
+              </a:lnSpc>
+              <a:buNone/>
+            </a:pPr>
+            <a:r>
+              <a:rPr lang="en-US" sz="1250" i="1" dirty="0">
+                <a:solidFill>
+                  <a:srgbClr val="FFFFFF"/>
+                </a:solidFill>
+                <a:latin typeface="Helvetica" pitchFamily="34" charset="0"/>
+                <a:ea typeface="Helvetica" pitchFamily="34" charset="-122"/>
+                <a:cs typeface="Helvetica" pitchFamily="34" charset="-120"/>
+              </a:rPr>
+              <a:t>Saya mau minta 2-3 orang mencoba katalog online saya sebelum benar-benar dipakai. Bantu saya susun: (1) satu tugas spesifik yang saya minta mereka lakukan, dan (2) 3-4 pertanyaan simpel untuk ditanya setelahnya soal pengalaman mereka.</a:t>
+            </a:r>
+            <a:endParaRPr lang="en-US" sz="1250" dirty="0"/>
+          </a:p>
+        </p:txBody>
+      </p:sp>
+      <p:sp>
+        <p:nvSpPr>
+          <p:cNvPr id="10" name="Shape 8"/>
+          <p:cNvSpPr/>
+          <p:nvPr/>
+        </p:nvSpPr>
+        <p:spPr>
+          <a:xfrm>
+            <a:off x="502920" y="3274822"/>
+            <a:ext cx="11183112" cy="1386840"/>
+          </a:xfrm>
+          <a:prstGeom prst="roundRect">
+            <a:avLst>
+              <a:gd name="adj" fmla="val 7912"/>
             </a:avLst>
           </a:prstGeom>
           <a:solidFill>
@@ -4889,13 +4992,13 @@
       </p:sp>
       <p:sp>
         <p:nvSpPr>
-          <p:cNvPr id="8" name="Text 6"/>
-          <p:cNvSpPr txBox="1"/>
-          <p:nvPr/>
-        </p:nvSpPr>
-        <p:spPr>
-          <a:xfrm>
-            <a:off x="740664" y="2103120"/>
+          <p:cNvPr id="11" name="Text 9"/>
+          <p:cNvSpPr txBox="1"/>
+          <p:nvPr/>
+        </p:nvSpPr>
+        <p:spPr>
+          <a:xfrm>
+            <a:off x="740664" y="3457702"/>
             <a:ext cx="10707624" cy="274320"/>
           </a:xfrm>
           <a:prstGeom prst="rect">
@@ -4928,14 +5031,14 @@
       </p:sp>
       <p:sp>
         <p:nvSpPr>
-          <p:cNvPr id="9" name="Text 7"/>
-          <p:cNvSpPr txBox="1"/>
-          <p:nvPr/>
-        </p:nvSpPr>
-        <p:spPr>
-          <a:xfrm>
-            <a:off x="740664" y="2468880"/>
-            <a:ext cx="10707624" cy="406400"/>
+          <p:cNvPr id="12" name="Text 10"/>
+          <p:cNvSpPr txBox="1"/>
+          <p:nvPr/>
+        </p:nvSpPr>
+        <p:spPr>
+          <a:xfrm>
+            <a:off x="740664" y="3823462"/>
+            <a:ext cx="10707624" cy="609600"/>
           </a:xfrm>
           <a:prstGeom prst="rect">
             <a:avLst/>
@@ -4962,7 +5065,7 @@
                 <a:ea typeface="Helvetica" pitchFamily="34" charset="-122"/>
                 <a:cs typeface="Helvetica" pitchFamily="34" charset="-120"/>
               </a:rPr>
-              <a:t>Buka URL live-mu langsung dari HP, jalankan checklist sapu bersih satu per satu, dan perbaiki (lalu upload ulang) kalau ada yang kurang pas. Lalu kirim link-nya ke minimal 2 orang, kasih satu tugas spesifik, dan catat di mana mereka bingung atau berhenti.</a:t>
+              <a:t>Buka URL live-mu langsung dari HP, jalankan checklist sapu bersih satu per satu, dan perbaiki (lalu upload ulang) kalau ada yang kurang pas. Lalu kirim prompt di atas ke Claude untuk menyusun rencana testingnya, kirim link-nya ke minimal 2 orang, dan catat di mana mereka bingung atau berhenti.</a:t>
             </a:r>
             <a:endParaRPr lang="en-US" sz="1250" dirty="0"/>
           </a:p>
@@ -4970,13 +5073,13 @@
       </p:sp>
       <p:sp>
         <p:nvSpPr>
-          <p:cNvPr id="10" name="Shape 8"/>
+          <p:cNvPr id="13" name="Shape 11"/>
           <p:cNvSpPr/>
           <p:nvPr/>
         </p:nvSpPr>
         <p:spPr>
           <a:xfrm>
-            <a:off x="502920" y="3332480"/>
+            <a:off x="502920" y="4890262"/>
             <a:ext cx="11183112" cy="1224661"/>
           </a:xfrm>
           <a:prstGeom prst="roundRect">
@@ -4997,13 +5100,13 @@
       </p:sp>
       <p:sp>
         <p:nvSpPr>
-          <p:cNvPr id="11" name="Shape 9"/>
+          <p:cNvPr id="14" name="Shape 12"/>
           <p:cNvSpPr/>
           <p:nvPr/>
         </p:nvSpPr>
         <p:spPr>
           <a:xfrm>
-            <a:off x="722376" y="3515360"/>
+            <a:off x="722376" y="5073142"/>
             <a:ext cx="365760" cy="365760"/>
           </a:xfrm>
           <a:prstGeom prst="ellipse">
@@ -5017,13 +5120,13 @@
       </p:sp>
       <p:sp>
         <p:nvSpPr>
-          <p:cNvPr id="12" name="Text 10"/>
-          <p:cNvSpPr txBox="1"/>
-          <p:nvPr/>
-        </p:nvSpPr>
-        <p:spPr>
-          <a:xfrm>
-            <a:off x="722376" y="3515360"/>
+          <p:cNvPr id="15" name="Text 13"/>
+          <p:cNvSpPr txBox="1"/>
+          <p:nvPr/>
+        </p:nvSpPr>
+        <p:spPr>
+          <a:xfrm>
+            <a:off x="722376" y="5073142"/>
             <a:ext cx="365760" cy="365760"/>
           </a:xfrm>
           <a:prstGeom prst="rect">
@@ -5056,13 +5159,13 @@
       </p:sp>
       <p:sp>
         <p:nvSpPr>
-          <p:cNvPr id="13" name="Text 11"/>
-          <p:cNvSpPr txBox="1"/>
-          <p:nvPr/>
-        </p:nvSpPr>
-        <p:spPr>
-          <a:xfrm>
-            <a:off x="1234440" y="3588512"/>
+          <p:cNvPr id="16" name="Text 14"/>
+          <p:cNvSpPr txBox="1"/>
+          <p:nvPr/>
+        </p:nvSpPr>
+        <p:spPr>
+          <a:xfrm>
+            <a:off x="1234440" y="5146294"/>
             <a:ext cx="10268712" cy="274320"/>
           </a:xfrm>
           <a:prstGeom prst="rect">
@@ -5095,13 +5198,13 @@
       </p:sp>
       <p:sp>
         <p:nvSpPr>
-          <p:cNvPr id="14" name="Text 12"/>
-          <p:cNvSpPr txBox="1"/>
-          <p:nvPr/>
-        </p:nvSpPr>
-        <p:spPr>
-          <a:xfrm>
-            <a:off x="722376" y="3990848"/>
+          <p:cNvPr id="17" name="Text 15"/>
+          <p:cNvSpPr txBox="1"/>
+          <p:nvPr/>
+        </p:nvSpPr>
+        <p:spPr>
+          <a:xfrm>
+            <a:off x="722376" y="5548630"/>
             <a:ext cx="10744200" cy="365125"/>
           </a:xfrm>
           <a:prstGeom prst="rect">
